--- a/syllabus/17_javascript/syllabus_17_js.pptx
+++ b/syllabus/17_javascript/syllabus_17_js.pptx
@@ -9,7 +9,7 @@
   </p:notesMasterIdLst>
   <p:sldIdLst>
     <p:sldId id="256" r:id="rId2"/>
-    <p:sldId id="408" r:id="rId3"/>
+    <p:sldId id="589" r:id="rId3"/>
     <p:sldId id="474" r:id="rId4"/>
     <p:sldId id="566" r:id="rId5"/>
     <p:sldId id="476" r:id="rId6"/>
@@ -198,7 +198,7 @@
         <p14:section name="17. Javascript" id="{7EB60391-1B3D-4FA7-8FB2-72C533B979D9}">
           <p14:sldIdLst>
             <p14:sldId id="256"/>
-            <p14:sldId id="408"/>
+            <p14:sldId id="589"/>
             <p14:sldId id="474"/>
             <p14:sldId id="566"/>
             <p14:sldId id="476"/>
@@ -408,7 +408,7 @@
           <a:p>
             <a:fld id="{FCE9742F-4DAE-47F5-9244-6ACC3985DD6B}" type="datetimeFigureOut">
               <a:rPr lang="fr-BE" smtClean="0"/>
-              <a:t>12-10-25</a:t>
+              <a:t>07-09-26</a:t>
             </a:fld>
             <a:endParaRPr lang="fr-BE"/>
           </a:p>
@@ -6803,7 +6803,7 @@
           <a:p>
             <a:fld id="{F3953782-D06E-4853-BE3C-64C197273937}" type="datetimeFigureOut">
               <a:rPr lang="fr-BE" smtClean="0"/>
-              <a:t>12-10-25</a:t>
+              <a:t>07-09-26</a:t>
             </a:fld>
             <a:endParaRPr lang="fr-BE"/>
           </a:p>
@@ -6885,6 +6885,22 @@
       </p:transition>
     </mc:Fallback>
   </mc:AlternateContent>
+  <p:extLst>
+    <p:ext uri="{DCECCB84-F9BA-43D5-87BE-67443E8EF086}">
+      <p15:sldGuideLst xmlns:p15="http://schemas.microsoft.com/office/powerpoint/2012/main">
+        <p15:guide id="1" orient="horz" pos="2160" userDrawn="1">
+          <p15:clr>
+            <a:srgbClr val="FBAE40"/>
+          </p15:clr>
+        </p15:guide>
+        <p15:guide id="2" pos="3840" userDrawn="1">
+          <p15:clr>
+            <a:srgbClr val="FBAE40"/>
+          </p15:clr>
+        </p15:guide>
+      </p15:sldGuideLst>
+    </p:ext>
+  </p:extLst>
 </p:sldLayout>
 </file>
 
@@ -8671,7 +8687,7 @@
           <a:p>
             <a:fld id="{F3953782-D06E-4853-BE3C-64C197273937}" type="datetimeFigureOut">
               <a:rPr lang="fr-BE" smtClean="0"/>
-              <a:t>12-10-25</a:t>
+              <a:t>07-09-26</a:t>
             </a:fld>
             <a:endParaRPr lang="fr-BE"/>
           </a:p>
@@ -8987,7 +9003,7 @@
           <a:p>
             <a:fld id="{F3953782-D06E-4853-BE3C-64C197273937}" type="datetimeFigureOut">
               <a:rPr lang="fr-BE" smtClean="0"/>
-              <a:t>12-10-25</a:t>
+              <a:t>07-09-26</a:t>
             </a:fld>
             <a:endParaRPr lang="fr-BE"/>
           </a:p>
@@ -9184,7 +9200,7 @@
           <a:p>
             <a:fld id="{F3953782-D06E-4853-BE3C-64C197273937}" type="datetimeFigureOut">
               <a:rPr lang="fr-BE" smtClean="0"/>
-              <a:t>12-10-25</a:t>
+              <a:t>07-09-26</a:t>
             </a:fld>
             <a:endParaRPr lang="fr-BE"/>
           </a:p>
@@ -9446,7 +9462,7 @@
           <a:p>
             <a:fld id="{F3953782-D06E-4853-BE3C-64C197273937}" type="datetimeFigureOut">
               <a:rPr lang="fr-BE" smtClean="0"/>
-              <a:t>12-10-25</a:t>
+              <a:t>07-09-26</a:t>
             </a:fld>
             <a:endParaRPr lang="fr-BE"/>
           </a:p>
@@ -9844,7 +9860,7 @@
           <a:p>
             <a:fld id="{F3953782-D06E-4853-BE3C-64C197273937}" type="datetimeFigureOut">
               <a:rPr lang="fr-BE" smtClean="0"/>
-              <a:t>12-10-25</a:t>
+              <a:t>07-09-26</a:t>
             </a:fld>
             <a:endParaRPr lang="fr-BE"/>
           </a:p>
@@ -9992,7 +10008,7 @@
           <a:p>
             <a:fld id="{F3953782-D06E-4853-BE3C-64C197273937}" type="datetimeFigureOut">
               <a:rPr lang="fr-BE" smtClean="0"/>
-              <a:t>12-10-25</a:t>
+              <a:t>07-09-26</a:t>
             </a:fld>
             <a:endParaRPr lang="fr-BE"/>
           </a:p>
@@ -10341,7 +10357,7 @@
           <a:p>
             <a:fld id="{F3953782-D06E-4853-BE3C-64C197273937}" type="datetimeFigureOut">
               <a:rPr lang="fr-BE" smtClean="0"/>
-              <a:t>12-10-25</a:t>
+              <a:t>07-09-26</a:t>
             </a:fld>
             <a:endParaRPr lang="fr-BE"/>
           </a:p>
@@ -10549,36 +10565,6 @@
           </a:p>
         </p:txBody>
       </p:sp>
-      <p:pic>
-        <p:nvPicPr>
-          <p:cNvPr id="8" name="Picture 7"/>
-          <p:cNvPicPr>
-            <a:picLocks noChangeAspect="1"/>
-          </p:cNvPicPr>
-          <p:nvPr/>
-        </p:nvPicPr>
-        <p:blipFill>
-          <a:blip r:embed="rId14">
-            <a:extLst>
-              <a:ext uri="{28A0092B-C50C-407E-A947-70E740481C1C}">
-                <a14:useLocalDpi xmlns:a14="http://schemas.microsoft.com/office/drawing/2010/main" val="0"/>
-              </a:ext>
-            </a:extLst>
-          </a:blip>
-          <a:stretch>
-            <a:fillRect/>
-          </a:stretch>
-        </p:blipFill>
-        <p:spPr>
-          <a:xfrm>
-            <a:off x="10830515" y="5719725"/>
-            <a:ext cx="1046571" cy="914479"/>
-          </a:xfrm>
-          <a:prstGeom prst="rect">
-            <a:avLst/>
-          </a:prstGeom>
-        </p:spPr>
-      </p:pic>
       <p:sp>
         <p:nvSpPr>
           <p:cNvPr id="4" name="Espace réservé du numéro de diapositive 3">
@@ -10667,7 +10653,7 @@
           <a:p>
             <a:fld id="{F3953782-D06E-4853-BE3C-64C197273937}" type="datetimeFigureOut">
               <a:rPr lang="fr-BE" smtClean="0"/>
-              <a:t>12-10-25</a:t>
+              <a:t>07-09-26</a:t>
             </a:fld>
             <a:endParaRPr lang="fr-BE"/>
           </a:p>
@@ -10716,42 +10702,6 @@
           </a:p>
         </p:txBody>
       </p:sp>
-      <p:pic>
-        <p:nvPicPr>
-          <p:cNvPr id="7" name="Picture 7">
-            <a:extLst>
-              <a:ext uri="{FF2B5EF4-FFF2-40B4-BE49-F238E27FC236}">
-                <a16:creationId xmlns:a16="http://schemas.microsoft.com/office/drawing/2014/main" id="{18A7CE26-4B2A-0791-7577-63BF2BD5A1FB}"/>
-              </a:ext>
-            </a:extLst>
-          </p:cNvPr>
-          <p:cNvPicPr>
-            <a:picLocks noChangeAspect="1"/>
-          </p:cNvPicPr>
-          <p:nvPr userDrawn="1"/>
-        </p:nvPicPr>
-        <p:blipFill>
-          <a:blip r:embed="rId14">
-            <a:extLst>
-              <a:ext uri="{28A0092B-C50C-407E-A947-70E740481C1C}">
-                <a14:useLocalDpi xmlns:a14="http://schemas.microsoft.com/office/drawing/2010/main" val="0"/>
-              </a:ext>
-            </a:extLst>
-          </a:blip>
-          <a:stretch>
-            <a:fillRect/>
-          </a:stretch>
-        </p:blipFill>
-        <p:spPr>
-          <a:xfrm>
-            <a:off x="10830515" y="5719725"/>
-            <a:ext cx="1046571" cy="914479"/>
-          </a:xfrm>
-          <a:prstGeom prst="rect">
-            <a:avLst/>
-          </a:prstGeom>
-        </p:spPr>
-      </p:pic>
     </p:spTree>
     <p:extLst>
       <p:ext uri="{BB962C8B-B14F-4D97-AF65-F5344CB8AC3E}">
@@ -11148,6 +11098,22 @@
       </a:lvl9pPr>
     </p:otherStyle>
   </p:txStyles>
+  <p:extLst>
+    <p:ext uri="{27BBF7A9-308A-43DC-89C8-2F10F3537804}">
+      <p15:sldGuideLst xmlns:p15="http://schemas.microsoft.com/office/powerpoint/2012/main">
+        <p15:guide id="1" orient="horz" pos="2160" userDrawn="1">
+          <p15:clr>
+            <a:srgbClr val="F26B43"/>
+          </p15:clr>
+        </p15:guide>
+        <p15:guide id="2" pos="3840" userDrawn="1">
+          <p15:clr>
+            <a:srgbClr val="F26B43"/>
+          </p15:clr>
+        </p15:guide>
+      </p15:sldGuideLst>
+    </p:ext>
+  </p:extLst>
 </p:sldMaster>
 </file>
 
@@ -11318,7 +11284,7 @@
         <p14:reveal/>
       </p:transition>
     </mc:Choice>
-    <mc:Fallback xmlns="" xmlns:mv="urn:schemas-microsoft-com:mac:vml" xmlns:c="http://schemas.openxmlformats.org/drawingml/2006/chart" xmlns:dgm="http://schemas.openxmlformats.org/drawingml/2006/diagram" xmlns:o="urn:schemas-microsoft-com:office:office" xmlns:v="urn:schemas-microsoft-com:vml" xmlns:pvml="urn:schemas-microsoft-com:office:powerpoint" xmlns:com="http://schemas.openxmlformats.org/drawingml/2006/compatibility" xmlns:p15="http://schemas.microsoft.com/office/powerpoint/2012/main" xmlns:ahyp="http://schemas.microsoft.com/office/drawing/2018/hyperlinkcolor">
+    <mc:Fallback xmlns:ahyp="http://schemas.microsoft.com/office/drawing/2018/hyperlinkcolor" xmlns:p15="http://schemas.microsoft.com/office/powerpoint/2012/main" xmlns:com="http://schemas.openxmlformats.org/drawingml/2006/compatibility" xmlns:pvml="urn:schemas-microsoft-com:office:powerpoint" xmlns:v="urn:schemas-microsoft-com:vml" xmlns:o="urn:schemas-microsoft-com:office:office" xmlns:dgm="http://schemas.openxmlformats.org/drawingml/2006/diagram" xmlns:c="http://schemas.openxmlformats.org/drawingml/2006/chart" xmlns:mv="urn:schemas-microsoft-com:mac:vml" xmlns="">
       <p:transition spd="med">
         <p:fade/>
       </p:transition>
@@ -12077,13 +12043,13 @@
           <p:nvPr/>
         </p:nvPicPr>
         <p:blipFill>
-          <a:blip r:embed="rId3">
+          <a:blip>
             <a:extLst>
               <a:ext uri="{28A0092B-C50C-407E-A947-70E740481C1C}">
                 <a14:useLocalDpi xmlns:a14="http://schemas.microsoft.com/office/drawing/2010/main" val="0"/>
               </a:ext>
               <a:ext uri="{96DAC541-7B7A-43D3-8B79-37D633B846F1}">
-                <asvg:svgBlip xmlns:asvg="http://schemas.microsoft.com/office/drawing/2016/SVG/main" r:embed="rId4"/>
+                <asvg:svgBlip xmlns:asvg="http://schemas.microsoft.com/office/drawing/2016/SVG/main" r:embed="rId3"/>
               </a:ext>
             </a:extLst>
           </a:blip>
@@ -12116,13 +12082,13 @@
           <p:nvPr/>
         </p:nvPicPr>
         <p:blipFill>
-          <a:blip r:embed="rId5">
+          <a:blip>
             <a:extLst>
               <a:ext uri="{28A0092B-C50C-407E-A947-70E740481C1C}">
                 <a14:useLocalDpi xmlns:a14="http://schemas.microsoft.com/office/drawing/2010/main" val="0"/>
               </a:ext>
               <a:ext uri="{96DAC541-7B7A-43D3-8B79-37D633B846F1}">
-                <asvg:svgBlip xmlns:asvg="http://schemas.microsoft.com/office/drawing/2016/SVG/main" r:embed="rId6"/>
+                <asvg:svgBlip xmlns:asvg="http://schemas.microsoft.com/office/drawing/2016/SVG/main" r:embed="rId4"/>
               </a:ext>
             </a:extLst>
           </a:blip>
@@ -12434,13 +12400,13 @@
           </p:nvPr>
         </p:nvPicPr>
         <p:blipFill>
-          <a:blip r:embed="rId3" cstate="print">
+          <a:blip cstate="print">
             <a:extLst>
               <a:ext uri="{28A0092B-C50C-407E-A947-70E740481C1C}">
                 <a14:useLocalDpi xmlns:a14="http://schemas.microsoft.com/office/drawing/2010/main" val="0"/>
               </a:ext>
               <a:ext uri="{96DAC541-7B7A-43D3-8B79-37D633B846F1}">
-                <asvg:svgBlip xmlns:asvg="http://schemas.microsoft.com/office/drawing/2016/SVG/main" r:embed="rId4"/>
+                <asvg:svgBlip xmlns:asvg="http://schemas.microsoft.com/office/drawing/2016/SVG/main" r:embed="rId3"/>
               </a:ext>
             </a:extLst>
           </a:blip>
@@ -13233,7 +13199,7 @@
             <a:fld id="{9D382761-2948-48A1-AEF1-887E6D461BE5}" type="datetime1">
               <a:rPr lang="fr-BE" smtClean="0"/>
               <a:pPr/>
-              <a:t>12-10-25</a:t>
+              <a:t>07-09-26</a:t>
             </a:fld>
             <a:endParaRPr lang="fr-BE"/>
           </a:p>
@@ -15330,13 +15296,13 @@
   <p:clrMapOvr>
     <a:masterClrMapping/>
   </p:clrMapOvr>
-  <mc:AlternateContent xmlns:mc="http://schemas.openxmlformats.org/markup-compatibility/2006">
-    <mc:Choice xmlns:p14="http://schemas.microsoft.com/office/powerpoint/2010/main" Requires="p14">
+  <mc:AlternateContent xmlns:mc="http://schemas.openxmlformats.org/markup-compatibility/2006" xmlns:p14="http://schemas.microsoft.com/office/powerpoint/2010/main">
+    <mc:Choice Requires="p14">
       <p:transition spd="slow">
         <p14:reveal/>
       </p:transition>
     </mc:Choice>
-    <mc:Fallback>
+    <mc:Fallback xmlns="">
       <p:transition spd="slow">
         <p:fade/>
       </p:transition>
@@ -15742,6 +15708,10 @@
           </p:nvPr>
         </p:nvSpPr>
         <p:spPr>
+          <a:xfrm>
+            <a:off x="839788" y="365125"/>
+            <a:ext cx="10515600" cy="1325563"/>
+          </a:xfrm>
           <a:noFill/>
           <a:ln>
             <a:noFill/>
@@ -15772,6 +15742,10 @@
           </p:nvPr>
         </p:nvSpPr>
         <p:spPr>
+          <a:xfrm>
+            <a:off x="839788" y="1681163"/>
+            <a:ext cx="3420000" cy="676143"/>
+          </a:xfrm>
           <a:noFill/>
           <a:ln>
             <a:noFill/>
@@ -15807,7 +15781,12 @@
             <p:ph type="body" idx="2"/>
           </p:nvPr>
         </p:nvSpPr>
-        <p:spPr/>
+        <p:spPr>
+          <a:xfrm>
+            <a:off x="839788" y="2353338"/>
+            <a:ext cx="3419999" cy="3836325"/>
+          </a:xfrm>
+        </p:spPr>
         <p:txBody>
           <a:bodyPr>
             <a:normAutofit/>
@@ -15873,7 +15852,12 @@
             <p:ph type="body" idx="3"/>
           </p:nvPr>
         </p:nvSpPr>
-        <p:spPr/>
+        <p:spPr>
+          <a:xfrm>
+            <a:off x="4394864" y="1677195"/>
+            <a:ext cx="3420000" cy="676143"/>
+          </a:xfrm>
+        </p:spPr>
         <p:txBody>
           <a:bodyPr anchor="t"/>
           <a:lstStyle/>
@@ -15904,8 +15888,8 @@
         </p:nvSpPr>
         <p:spPr>
           <a:xfrm>
-            <a:off x="4105275" y="2501107"/>
-            <a:ext cx="3709587" cy="3684588"/>
+            <a:off x="4394863" y="2357306"/>
+            <a:ext cx="3419999" cy="3828389"/>
           </a:xfrm>
         </p:spPr>
         <p:txBody>
@@ -15998,7 +15982,12 @@
             <p:ph type="body" idx="10"/>
           </p:nvPr>
         </p:nvSpPr>
-        <p:spPr/>
+        <p:spPr>
+          <a:xfrm>
+            <a:off x="7949940" y="1690688"/>
+            <a:ext cx="3420000" cy="662650"/>
+          </a:xfrm>
+        </p:spPr>
         <p:txBody>
           <a:bodyPr anchor="t"/>
           <a:lstStyle/>
@@ -16026,54 +16015,354 @@
             <p:ph type="body" idx="11"/>
           </p:nvPr>
         </p:nvSpPr>
-        <p:spPr/>
+        <p:spPr>
+          <a:xfrm>
+            <a:off x="7949937" y="2377806"/>
+            <a:ext cx="3433923" cy="3836325"/>
+          </a:xfrm>
+        </p:spPr>
         <p:txBody>
           <a:bodyPr>
+            <a:normAutofit lnSpcReduction="10000"/>
+          </a:bodyPr>
+          <a:lstStyle/>
+          <a:p>
+            <a:pPr marL="114300" lvl="0" indent="0">
+              <a:buNone/>
+            </a:pPr>
+            <a:r>
+              <a:rPr lang="fr-BE" sz="2400"/>
+              <a:t>21. Middleware PHP</a:t>
+            </a:r>
+          </a:p>
+          <a:p>
+            <a:pPr marL="114300" indent="0">
+              <a:buNone/>
+            </a:pPr>
+            <a:r>
+              <a:rPr lang="fr-BE" sz="2400"/>
+              <a:t>22. Traitement du formulaire</a:t>
+            </a:r>
+          </a:p>
+          <a:p>
+            <a:pPr marL="114300" lvl="0" indent="0">
+              <a:buNone/>
+            </a:pPr>
+            <a:r>
+              <a:rPr lang="fr-BE" sz="2400"/>
+              <a:t>23. Architecture MVC</a:t>
+            </a:r>
+          </a:p>
+          <a:p>
+            <a:pPr marL="114300" lvl="0" indent="0">
+              <a:buNone/>
+            </a:pPr>
+            <a:r>
+              <a:rPr lang="fr-BE" sz="2400"/>
+              <a:t>24. Données SQL</a:t>
+            </a:r>
+          </a:p>
+          <a:p>
+            <a:pPr marL="114300" lvl="0" indent="0">
+              <a:buNone/>
+            </a:pPr>
+            <a:r>
+              <a:rPr lang="fr-BE" sz="2400"/>
+              <a:t>25. Données NoSQL</a:t>
+            </a:r>
+          </a:p>
+          <a:p>
+            <a:pPr marL="114300" lvl="0" indent="0">
+              <a:buNone/>
+            </a:pPr>
+            <a:endParaRPr lang="fr-BE" sz="2400"/>
+          </a:p>
+          <a:p>
+            <a:pPr marL="114300" lvl="0" indent="0">
+              <a:buNone/>
+            </a:pPr>
+            <a:endParaRPr lang="fr-BE" sz="2400"/>
+          </a:p>
+          <a:p>
+            <a:pPr marL="114300" indent="0">
+              <a:buNone/>
+            </a:pPr>
+            <a:r>
+              <a:rPr lang="fr-BE" sz="2400"/>
+              <a:t>31. Requête asynchrone</a:t>
+            </a:r>
+          </a:p>
+          <a:p>
+            <a:pPr marL="114300" indent="0">
+              <a:buNone/>
+            </a:pPr>
+            <a:endParaRPr lang="fr-BE" sz="2400"/>
+          </a:p>
+        </p:txBody>
+      </p:sp>
+      <p:sp>
+        <p:nvSpPr>
+          <p:cNvPr id="5" name="Espace réservé du texte 9">
+            <a:extLst>
+              <a:ext uri="{FF2B5EF4-FFF2-40B4-BE49-F238E27FC236}">
+                <a16:creationId xmlns:a16="http://schemas.microsoft.com/office/drawing/2014/main" id="{F7F80AB2-1A54-F3C7-63AD-635689291298}"/>
+              </a:ext>
+            </a:extLst>
+          </p:cNvPr>
+          <p:cNvSpPr txBox="1">
+            <a:spLocks/>
+          </p:cNvSpPr>
+          <p:nvPr/>
+        </p:nvSpPr>
+        <p:spPr>
+          <a:xfrm>
+            <a:off x="7932738" y="5026572"/>
+            <a:ext cx="3751261" cy="823912"/>
+          </a:xfrm>
+          <a:prstGeom prst="rect">
+            <a:avLst/>
+          </a:prstGeom>
+          <a:noFill/>
+          <a:ln>
+            <a:noFill/>
+          </a:ln>
+        </p:spPr>
+        <p:txBody>
+          <a:bodyPr spcFirstLastPara="1" vert="horz" wrap="square" lIns="91425" tIns="45700" rIns="91425" bIns="45700" rtlCol="0" anchor="t" anchorCtr="0">
             <a:normAutofit/>
           </a:bodyPr>
-          <a:lstStyle/>
-          <a:p>
-            <a:pPr lvl="0"/>
-            <a:r>
-              <a:rPr lang="fr-BE" sz="2400"/>
-              <a:t>21. Middleware PHP</a:t>
-            </a:r>
-          </a:p>
-          <a:p>
-            <a:r>
-              <a:rPr lang="fr-BE" sz="2400"/>
-              <a:t>22. Traitement du formulaire</a:t>
-            </a:r>
-          </a:p>
-          <a:p>
-            <a:pPr lvl="0"/>
-            <a:r>
-              <a:rPr lang="fr-BE" sz="2400"/>
-              <a:t>23. Architecture MVC</a:t>
-            </a:r>
-          </a:p>
-          <a:p>
-            <a:pPr lvl="0"/>
-            <a:r>
-              <a:rPr lang="fr-BE" sz="2400"/>
-              <a:t>24. Données SQL</a:t>
-            </a:r>
-          </a:p>
-          <a:p>
-            <a:pPr lvl="0"/>
-            <a:r>
-              <a:rPr lang="fr-BE" sz="2400"/>
-              <a:t>25. Données NoSQL</a:t>
-            </a:r>
-          </a:p>
-          <a:p>
-            <a:r>
-              <a:rPr lang="fr-BE" sz="2400"/>
-              <a:t>27. Requête asynchrone</a:t>
-            </a:r>
-          </a:p>
-          <a:p>
-            <a:endParaRPr lang="fr-BE" sz="2400"/>
+          <a:lstStyle>
+            <a:lvl1pPr marL="457200" lvl="0" indent="-228600" algn="l" defTabSz="914377" rtl="0" eaLnBrk="1" latinLnBrk="0" hangingPunct="1">
+              <a:lnSpc>
+                <a:spcPct val="90000"/>
+              </a:lnSpc>
+              <a:spcBef>
+                <a:spcPts val="1000"/>
+              </a:spcBef>
+              <a:spcAft>
+                <a:spcPts val="0"/>
+              </a:spcAft>
+              <a:buClr>
+                <a:schemeClr val="dk1"/>
+              </a:buClr>
+              <a:buSzPts val="2400"/>
+              <a:buFont typeface="Wingdings" panose="05000000000000000000" pitchFamily="2" charset="2"/>
+              <a:buNone/>
+              <a:defRPr sz="2400" b="1" kern="1200">
+                <a:solidFill>
+                  <a:schemeClr val="tx1"/>
+                </a:solidFill>
+                <a:latin typeface="+mn-lt"/>
+                <a:ea typeface="+mn-ea"/>
+                <a:cs typeface="+mn-cs"/>
+              </a:defRPr>
+            </a:lvl1pPr>
+            <a:lvl2pPr marL="914400" lvl="1" indent="-228600" algn="l" defTabSz="914377" rtl="0" eaLnBrk="1" latinLnBrk="0" hangingPunct="1">
+              <a:lnSpc>
+                <a:spcPct val="90000"/>
+              </a:lnSpc>
+              <a:spcBef>
+                <a:spcPts val="500"/>
+              </a:spcBef>
+              <a:spcAft>
+                <a:spcPts val="0"/>
+              </a:spcAft>
+              <a:buClr>
+                <a:schemeClr val="dk1"/>
+              </a:buClr>
+              <a:buSzPts val="2000"/>
+              <a:buFont typeface="Wingdings" panose="05000000000000000000" pitchFamily="2" charset="2"/>
+              <a:buNone/>
+              <a:defRPr sz="2000" b="1" kern="1200">
+                <a:solidFill>
+                  <a:schemeClr val="tx1"/>
+                </a:solidFill>
+                <a:latin typeface="+mn-lt"/>
+                <a:ea typeface="+mn-ea"/>
+                <a:cs typeface="+mn-cs"/>
+              </a:defRPr>
+            </a:lvl2pPr>
+            <a:lvl3pPr marL="1371600" lvl="2" indent="-228600" algn="l" defTabSz="914377" rtl="0" eaLnBrk="1" latinLnBrk="0" hangingPunct="1">
+              <a:lnSpc>
+                <a:spcPct val="90000"/>
+              </a:lnSpc>
+              <a:spcBef>
+                <a:spcPts val="500"/>
+              </a:spcBef>
+              <a:spcAft>
+                <a:spcPts val="0"/>
+              </a:spcAft>
+              <a:buClr>
+                <a:schemeClr val="dk1"/>
+              </a:buClr>
+              <a:buSzPts val="1800"/>
+              <a:buFont typeface="Wingdings" panose="05000000000000000000" pitchFamily="2" charset="2"/>
+              <a:buNone/>
+              <a:defRPr sz="1800" b="1" kern="1200">
+                <a:solidFill>
+                  <a:schemeClr val="tx1"/>
+                </a:solidFill>
+                <a:latin typeface="+mn-lt"/>
+                <a:ea typeface="+mn-ea"/>
+                <a:cs typeface="+mn-cs"/>
+              </a:defRPr>
+            </a:lvl3pPr>
+            <a:lvl4pPr marL="1828800" lvl="3" indent="-228600" algn="l" defTabSz="914377" rtl="0" eaLnBrk="1" latinLnBrk="0" hangingPunct="1">
+              <a:lnSpc>
+                <a:spcPct val="90000"/>
+              </a:lnSpc>
+              <a:spcBef>
+                <a:spcPts val="500"/>
+              </a:spcBef>
+              <a:spcAft>
+                <a:spcPts val="0"/>
+              </a:spcAft>
+              <a:buClr>
+                <a:schemeClr val="dk1"/>
+              </a:buClr>
+              <a:buSzPts val="1600"/>
+              <a:buFont typeface="Wingdings" panose="05000000000000000000" pitchFamily="2" charset="2"/>
+              <a:buNone/>
+              <a:defRPr sz="1600" b="1" kern="1200">
+                <a:solidFill>
+                  <a:schemeClr val="tx1"/>
+                </a:solidFill>
+                <a:latin typeface="+mn-lt"/>
+                <a:ea typeface="+mn-ea"/>
+                <a:cs typeface="+mn-cs"/>
+              </a:defRPr>
+            </a:lvl4pPr>
+            <a:lvl5pPr marL="2286000" lvl="4" indent="-228600" algn="l" defTabSz="914377" rtl="0" eaLnBrk="1" latinLnBrk="0" hangingPunct="1">
+              <a:lnSpc>
+                <a:spcPct val="90000"/>
+              </a:lnSpc>
+              <a:spcBef>
+                <a:spcPts val="500"/>
+              </a:spcBef>
+              <a:spcAft>
+                <a:spcPts val="0"/>
+              </a:spcAft>
+              <a:buClr>
+                <a:schemeClr val="dk1"/>
+              </a:buClr>
+              <a:buSzPts val="1600"/>
+              <a:buFont typeface="Wingdings" panose="05000000000000000000" pitchFamily="2" charset="2"/>
+              <a:buNone/>
+              <a:defRPr sz="1600" b="1" kern="1200">
+                <a:solidFill>
+                  <a:schemeClr val="tx1"/>
+                </a:solidFill>
+                <a:latin typeface="+mn-lt"/>
+                <a:ea typeface="+mn-ea"/>
+                <a:cs typeface="+mn-cs"/>
+              </a:defRPr>
+            </a:lvl5pPr>
+            <a:lvl6pPr marL="2743200" lvl="5" indent="-228600" algn="l" defTabSz="914377" rtl="0" eaLnBrk="1" latinLnBrk="0" hangingPunct="1">
+              <a:lnSpc>
+                <a:spcPct val="90000"/>
+              </a:lnSpc>
+              <a:spcBef>
+                <a:spcPts val="500"/>
+              </a:spcBef>
+              <a:spcAft>
+                <a:spcPts val="0"/>
+              </a:spcAft>
+              <a:buClr>
+                <a:schemeClr val="dk1"/>
+              </a:buClr>
+              <a:buSzPts val="1600"/>
+              <a:buFont typeface="Arial" panose="020B0604020202020204" pitchFamily="34" charset="0"/>
+              <a:buNone/>
+              <a:defRPr sz="1600" b="1" kern="1200">
+                <a:solidFill>
+                  <a:schemeClr val="tx1"/>
+                </a:solidFill>
+                <a:latin typeface="+mn-lt"/>
+                <a:ea typeface="+mn-ea"/>
+                <a:cs typeface="+mn-cs"/>
+              </a:defRPr>
+            </a:lvl6pPr>
+            <a:lvl7pPr marL="3200400" lvl="6" indent="-228600" algn="l" defTabSz="914377" rtl="0" eaLnBrk="1" latinLnBrk="0" hangingPunct="1">
+              <a:lnSpc>
+                <a:spcPct val="90000"/>
+              </a:lnSpc>
+              <a:spcBef>
+                <a:spcPts val="500"/>
+              </a:spcBef>
+              <a:spcAft>
+                <a:spcPts val="0"/>
+              </a:spcAft>
+              <a:buClr>
+                <a:schemeClr val="dk1"/>
+              </a:buClr>
+              <a:buSzPts val="1600"/>
+              <a:buFont typeface="Arial" panose="020B0604020202020204" pitchFamily="34" charset="0"/>
+              <a:buNone/>
+              <a:defRPr sz="1600" b="1" kern="1200">
+                <a:solidFill>
+                  <a:schemeClr val="tx1"/>
+                </a:solidFill>
+                <a:latin typeface="+mn-lt"/>
+                <a:ea typeface="+mn-ea"/>
+                <a:cs typeface="+mn-cs"/>
+              </a:defRPr>
+            </a:lvl7pPr>
+            <a:lvl8pPr marL="3657600" lvl="7" indent="-228600" algn="l" defTabSz="914377" rtl="0" eaLnBrk="1" latinLnBrk="0" hangingPunct="1">
+              <a:lnSpc>
+                <a:spcPct val="90000"/>
+              </a:lnSpc>
+              <a:spcBef>
+                <a:spcPts val="500"/>
+              </a:spcBef>
+              <a:spcAft>
+                <a:spcPts val="0"/>
+              </a:spcAft>
+              <a:buClr>
+                <a:schemeClr val="dk1"/>
+              </a:buClr>
+              <a:buSzPts val="1600"/>
+              <a:buFont typeface="Arial" panose="020B0604020202020204" pitchFamily="34" charset="0"/>
+              <a:buNone/>
+              <a:defRPr sz="1600" b="1" kern="1200">
+                <a:solidFill>
+                  <a:schemeClr val="tx1"/>
+                </a:solidFill>
+                <a:latin typeface="+mn-lt"/>
+                <a:ea typeface="+mn-ea"/>
+                <a:cs typeface="+mn-cs"/>
+              </a:defRPr>
+            </a:lvl8pPr>
+            <a:lvl9pPr marL="4114800" lvl="8" indent="-228600" algn="l" defTabSz="914377" rtl="0" eaLnBrk="1" latinLnBrk="0" hangingPunct="1">
+              <a:lnSpc>
+                <a:spcPct val="90000"/>
+              </a:lnSpc>
+              <a:spcBef>
+                <a:spcPts val="500"/>
+              </a:spcBef>
+              <a:spcAft>
+                <a:spcPts val="0"/>
+              </a:spcAft>
+              <a:buClr>
+                <a:schemeClr val="dk1"/>
+              </a:buClr>
+              <a:buSzPts val="1600"/>
+              <a:buFont typeface="Arial" panose="020B0604020202020204" pitchFamily="34" charset="0"/>
+              <a:buNone/>
+              <a:defRPr sz="1600" b="1" kern="1200">
+                <a:solidFill>
+                  <a:schemeClr val="tx1"/>
+                </a:solidFill>
+                <a:latin typeface="+mn-lt"/>
+                <a:ea typeface="+mn-ea"/>
+                <a:cs typeface="+mn-cs"/>
+              </a:defRPr>
+            </a:lvl9pPr>
+          </a:lstStyle>
+          <a:p>
+            <a:r>
+              <a:rPr lang="fr-BE"/>
+              <a:t>Single Page Application</a:t>
+            </a:r>
           </a:p>
         </p:txBody>
       </p:sp>
@@ -16088,7 +16377,7 @@
         <p14:reveal/>
       </p:transition>
     </mc:Choice>
-    <mc:Fallback xmlns:ahyp="http://schemas.microsoft.com/office/drawing/2018/hyperlinkcolor" xmlns:p15="http://schemas.microsoft.com/office/powerpoint/2012/main" xmlns:com="http://schemas.openxmlformats.org/drawingml/2006/compatibility" xmlns:pvml="urn:schemas-microsoft-com:office:powerpoint" xmlns:v="urn:schemas-microsoft-com:vml" xmlns:o="urn:schemas-microsoft-com:office:office" xmlns:dgm="http://schemas.openxmlformats.org/drawingml/2006/diagram" xmlns:c="http://schemas.openxmlformats.org/drawingml/2006/chart" xmlns:mv="urn:schemas-microsoft-com:mac:vml" xmlns="">
+    <mc:Fallback xmlns="" xmlns:mv="urn:schemas-microsoft-com:mac:vml" xmlns:c="http://schemas.openxmlformats.org/drawingml/2006/chart" xmlns:dgm="http://schemas.openxmlformats.org/drawingml/2006/diagram" xmlns:o="urn:schemas-microsoft-com:office:office" xmlns:v="urn:schemas-microsoft-com:vml" xmlns:pvml="urn:schemas-microsoft-com:office:powerpoint" xmlns:com="http://schemas.openxmlformats.org/drawingml/2006/compatibility" xmlns:p15="http://schemas.microsoft.com/office/powerpoint/2012/main" xmlns:ahyp="http://schemas.microsoft.com/office/drawing/2018/hyperlinkcolor">
       <p:transition spd="med">
         <p:fade/>
       </p:transition>
@@ -16191,13 +16480,13 @@
           </p:nvPr>
         </p:nvPicPr>
         <p:blipFill>
-          <a:blip r:embed="rId3" cstate="print">
+          <a:blip cstate="print">
             <a:extLst>
               <a:ext uri="{28A0092B-C50C-407E-A947-70E740481C1C}">
                 <a14:useLocalDpi xmlns:a14="http://schemas.microsoft.com/office/drawing/2010/main" val="0"/>
               </a:ext>
               <a:ext uri="{96DAC541-7B7A-43D3-8B79-37D633B846F1}">
-                <asvg:svgBlip xmlns:asvg="http://schemas.microsoft.com/office/drawing/2016/SVG/main" r:embed="rId4"/>
+                <asvg:svgBlip xmlns:asvg="http://schemas.microsoft.com/office/drawing/2016/SVG/main" r:embed="rId3"/>
               </a:ext>
             </a:extLst>
           </a:blip>
@@ -18007,13 +18296,13 @@
           </p:nvPr>
         </p:nvPicPr>
         <p:blipFill>
-          <a:blip r:embed="rId3" cstate="print">
+          <a:blip cstate="print">
             <a:extLst>
               <a:ext uri="{28A0092B-C50C-407E-A947-70E740481C1C}">
                 <a14:useLocalDpi xmlns:a14="http://schemas.microsoft.com/office/drawing/2010/main" val="0"/>
               </a:ext>
               <a:ext uri="{96DAC541-7B7A-43D3-8B79-37D633B846F1}">
-                <asvg:svgBlip xmlns:asvg="http://schemas.microsoft.com/office/drawing/2016/SVG/main" r:embed="rId4"/>
+                <asvg:svgBlip xmlns:asvg="http://schemas.microsoft.com/office/drawing/2016/SVG/main" r:embed="rId3"/>
               </a:ext>
             </a:extLst>
           </a:blip>
@@ -19265,13 +19554,13 @@
           </p:nvPr>
         </p:nvPicPr>
         <p:blipFill>
-          <a:blip r:embed="rId3" cstate="print">
+          <a:blip cstate="print">
             <a:extLst>
               <a:ext uri="{28A0092B-C50C-407E-A947-70E740481C1C}">
                 <a14:useLocalDpi xmlns:a14="http://schemas.microsoft.com/office/drawing/2010/main" val="0"/>
               </a:ext>
               <a:ext uri="{96DAC541-7B7A-43D3-8B79-37D633B846F1}">
-                <asvg:svgBlip xmlns:asvg="http://schemas.microsoft.com/office/drawing/2016/SVG/main" r:embed="rId4"/>
+                <asvg:svgBlip xmlns:asvg="http://schemas.microsoft.com/office/drawing/2016/SVG/main" r:embed="rId3"/>
               </a:ext>
             </a:extLst>
           </a:blip>
@@ -19297,7 +19586,7 @@
           <p:nvPr/>
         </p:nvPicPr>
         <p:blipFill>
-          <a:blip r:embed="rId5">
+          <a:blip r:embed="rId4">
             <a:clrChange>
               <a:clrFrom>
                 <a:srgbClr val="FFFFFF"/>
@@ -19312,7 +19601,7 @@
             <a:extLst>
               <a:ext uri="{BEBA8EAE-BF5A-486C-A8C5-ECC9F3942E4B}">
                 <a14:imgProps xmlns:a14="http://schemas.microsoft.com/office/drawing/2010/main">
-                  <a14:imgLayer r:embed="rId6">
+                  <a14:imgLayer r:embed="rId5">
                     <a14:imgEffect>
                       <a14:artisticPastelsSmooth/>
                     </a14:imgEffect>
@@ -20007,13 +20296,13 @@
           </p:nvPr>
         </p:nvPicPr>
         <p:blipFill>
-          <a:blip r:embed="rId2" cstate="print">
+          <a:blip cstate="print">
             <a:extLst>
               <a:ext uri="{28A0092B-C50C-407E-A947-70E740481C1C}">
                 <a14:useLocalDpi xmlns:a14="http://schemas.microsoft.com/office/drawing/2010/main" val="0"/>
               </a:ext>
               <a:ext uri="{96DAC541-7B7A-43D3-8B79-37D633B846F1}">
-                <asvg:svgBlip xmlns:asvg="http://schemas.microsoft.com/office/drawing/2016/SVG/main" r:embed="rId3"/>
+                <asvg:svgBlip xmlns:asvg="http://schemas.microsoft.com/office/drawing/2016/SVG/main" r:embed="rId2"/>
               </a:ext>
             </a:extLst>
           </a:blip>
@@ -23832,13 +24121,13 @@
           </p:nvPr>
         </p:nvPicPr>
         <p:blipFill>
-          <a:blip r:embed="rId2" cstate="print">
+          <a:blip cstate="print">
             <a:extLst>
               <a:ext uri="{28A0092B-C50C-407E-A947-70E740481C1C}">
                 <a14:useLocalDpi xmlns:a14="http://schemas.microsoft.com/office/drawing/2010/main" val="0"/>
               </a:ext>
               <a:ext uri="{96DAC541-7B7A-43D3-8B79-37D633B846F1}">
-                <asvg:svgBlip xmlns:asvg="http://schemas.microsoft.com/office/drawing/2016/SVG/main" r:embed="rId3"/>
+                <asvg:svgBlip xmlns:asvg="http://schemas.microsoft.com/office/drawing/2016/SVG/main" r:embed="rId2"/>
               </a:ext>
             </a:extLst>
           </a:blip>
@@ -28610,13 +28899,13 @@
           <p:nvPr/>
         </p:nvPicPr>
         <p:blipFill>
-          <a:blip r:embed="rId4" cstate="print">
+          <a:blip cstate="print">
             <a:extLst>
               <a:ext uri="{28A0092B-C50C-407E-A947-70E740481C1C}">
                 <a14:useLocalDpi xmlns:a14="http://schemas.microsoft.com/office/drawing/2010/main" val="0"/>
               </a:ext>
               <a:ext uri="{96DAC541-7B7A-43D3-8B79-37D633B846F1}">
-                <asvg:svgBlip xmlns:asvg="http://schemas.microsoft.com/office/drawing/2016/SVG/main" r:embed="rId5"/>
+                <asvg:svgBlip xmlns:asvg="http://schemas.microsoft.com/office/drawing/2016/SVG/main" r:embed="rId4"/>
               </a:ext>
             </a:extLst>
           </a:blip>
@@ -28649,13 +28938,13 @@
           <p:nvPr/>
         </p:nvPicPr>
         <p:blipFill>
-          <a:blip r:embed="rId4" cstate="print">
+          <a:blip cstate="print">
             <a:extLst>
               <a:ext uri="{28A0092B-C50C-407E-A947-70E740481C1C}">
                 <a14:useLocalDpi xmlns:a14="http://schemas.microsoft.com/office/drawing/2010/main" val="0"/>
               </a:ext>
               <a:ext uri="{96DAC541-7B7A-43D3-8B79-37D633B846F1}">
-                <asvg:svgBlip xmlns:asvg="http://schemas.microsoft.com/office/drawing/2016/SVG/main" r:embed="rId5"/>
+                <asvg:svgBlip xmlns:asvg="http://schemas.microsoft.com/office/drawing/2016/SVG/main" r:embed="rId4"/>
               </a:ext>
             </a:extLst>
           </a:blip>
@@ -28688,13 +28977,13 @@
           <p:nvPr/>
         </p:nvPicPr>
         <p:blipFill>
-          <a:blip r:embed="rId4" cstate="print">
+          <a:blip cstate="print">
             <a:extLst>
               <a:ext uri="{28A0092B-C50C-407E-A947-70E740481C1C}">
                 <a14:useLocalDpi xmlns:a14="http://schemas.microsoft.com/office/drawing/2010/main" val="0"/>
               </a:ext>
               <a:ext uri="{96DAC541-7B7A-43D3-8B79-37D633B846F1}">
-                <asvg:svgBlip xmlns:asvg="http://schemas.microsoft.com/office/drawing/2016/SVG/main" r:embed="rId5"/>
+                <asvg:svgBlip xmlns:asvg="http://schemas.microsoft.com/office/drawing/2016/SVG/main" r:embed="rId4"/>
               </a:ext>
             </a:extLst>
           </a:blip>
@@ -28727,13 +29016,13 @@
           <p:nvPr/>
         </p:nvPicPr>
         <p:blipFill>
-          <a:blip r:embed="rId4" cstate="print">
+          <a:blip cstate="print">
             <a:extLst>
               <a:ext uri="{28A0092B-C50C-407E-A947-70E740481C1C}">
                 <a14:useLocalDpi xmlns:a14="http://schemas.microsoft.com/office/drawing/2010/main" val="0"/>
               </a:ext>
               <a:ext uri="{96DAC541-7B7A-43D3-8B79-37D633B846F1}">
-                <asvg:svgBlip xmlns:asvg="http://schemas.microsoft.com/office/drawing/2016/SVG/main" r:embed="rId5"/>
+                <asvg:svgBlip xmlns:asvg="http://schemas.microsoft.com/office/drawing/2016/SVG/main" r:embed="rId4"/>
               </a:ext>
             </a:extLst>
           </a:blip>
@@ -28916,13 +29205,13 @@
           <p:nvPr/>
         </p:nvPicPr>
         <p:blipFill>
-          <a:blip r:embed="rId4" cstate="print">
+          <a:blip cstate="print">
             <a:extLst>
               <a:ext uri="{28A0092B-C50C-407E-A947-70E740481C1C}">
                 <a14:useLocalDpi xmlns:a14="http://schemas.microsoft.com/office/drawing/2010/main" val="0"/>
               </a:ext>
               <a:ext uri="{96DAC541-7B7A-43D3-8B79-37D633B846F1}">
-                <asvg:svgBlip xmlns:asvg="http://schemas.microsoft.com/office/drawing/2016/SVG/main" r:embed="rId5"/>
+                <asvg:svgBlip xmlns:asvg="http://schemas.microsoft.com/office/drawing/2016/SVG/main" r:embed="rId4"/>
               </a:ext>
             </a:extLst>
           </a:blip>
@@ -28955,13 +29244,13 @@
           <p:nvPr/>
         </p:nvPicPr>
         <p:blipFill>
-          <a:blip r:embed="rId6" cstate="print">
+          <a:blip cstate="print">
             <a:extLst>
               <a:ext uri="{28A0092B-C50C-407E-A947-70E740481C1C}">
                 <a14:useLocalDpi xmlns:a14="http://schemas.microsoft.com/office/drawing/2010/main" val="0"/>
               </a:ext>
               <a:ext uri="{96DAC541-7B7A-43D3-8B79-37D633B846F1}">
-                <asvg:svgBlip xmlns:asvg="http://schemas.microsoft.com/office/drawing/2016/SVG/main" r:embed="rId7"/>
+                <asvg:svgBlip xmlns:asvg="http://schemas.microsoft.com/office/drawing/2016/SVG/main" r:embed="rId5"/>
               </a:ext>
             </a:extLst>
           </a:blip>
@@ -29693,13 +29982,13 @@
           </p:nvPr>
         </p:nvPicPr>
         <p:blipFill>
-          <a:blip r:embed="rId3" cstate="print">
+          <a:blip cstate="print">
             <a:extLst>
               <a:ext uri="{28A0092B-C50C-407E-A947-70E740481C1C}">
                 <a14:useLocalDpi xmlns:a14="http://schemas.microsoft.com/office/drawing/2010/main" val="0"/>
               </a:ext>
               <a:ext uri="{96DAC541-7B7A-43D3-8B79-37D633B846F1}">
-                <asvg:svgBlip xmlns:asvg="http://schemas.microsoft.com/office/drawing/2016/SVG/main" r:embed="rId4"/>
+                <asvg:svgBlip xmlns:asvg="http://schemas.microsoft.com/office/drawing/2016/SVG/main" r:embed="rId3"/>
               </a:ext>
             </a:extLst>
           </a:blip>
@@ -35957,13 +36246,13 @@
           </p:nvPr>
         </p:nvPicPr>
         <p:blipFill>
-          <a:blip r:embed="rId3" cstate="print">
+          <a:blip cstate="print">
             <a:extLst>
               <a:ext uri="{28A0092B-C50C-407E-A947-70E740481C1C}">
                 <a14:useLocalDpi xmlns:a14="http://schemas.microsoft.com/office/drawing/2010/main" val="0"/>
               </a:ext>
               <a:ext uri="{96DAC541-7B7A-43D3-8B79-37D633B846F1}">
-                <asvg:svgBlip xmlns:asvg="http://schemas.microsoft.com/office/drawing/2016/SVG/main" r:embed="rId4"/>
+                <asvg:svgBlip xmlns:asvg="http://schemas.microsoft.com/office/drawing/2016/SVG/main" r:embed="rId3"/>
               </a:ext>
             </a:extLst>
           </a:blip>
@@ -37500,13 +37789,13 @@
           </p:nvPr>
         </p:nvPicPr>
         <p:blipFill>
-          <a:blip r:embed="rId3" cstate="print">
+          <a:blip cstate="print">
             <a:extLst>
               <a:ext uri="{28A0092B-C50C-407E-A947-70E740481C1C}">
                 <a14:useLocalDpi xmlns:a14="http://schemas.microsoft.com/office/drawing/2010/main" val="0"/>
               </a:ext>
               <a:ext uri="{96DAC541-7B7A-43D3-8B79-37D633B846F1}">
-                <asvg:svgBlip xmlns:asvg="http://schemas.microsoft.com/office/drawing/2016/SVG/main" r:embed="rId4"/>
+                <asvg:svgBlip xmlns:asvg="http://schemas.microsoft.com/office/drawing/2016/SVG/main" r:embed="rId3"/>
               </a:ext>
             </a:extLst>
           </a:blip>
@@ -43405,13 +43694,13 @@
           </p:nvPr>
         </p:nvPicPr>
         <p:blipFill>
-          <a:blip r:embed="rId2" cstate="print">
+          <a:blip cstate="print">
             <a:extLst>
               <a:ext uri="{28A0092B-C50C-407E-A947-70E740481C1C}">
                 <a14:useLocalDpi xmlns:a14="http://schemas.microsoft.com/office/drawing/2010/main" val="0"/>
               </a:ext>
               <a:ext uri="{96DAC541-7B7A-43D3-8B79-37D633B846F1}">
-                <asvg:svgBlip xmlns:asvg="http://schemas.microsoft.com/office/drawing/2016/SVG/main" r:embed="rId3"/>
+                <asvg:svgBlip xmlns:asvg="http://schemas.microsoft.com/office/drawing/2016/SVG/main" r:embed="rId2"/>
               </a:ext>
             </a:extLst>
           </a:blip>
@@ -45850,13 +46139,13 @@
           </p:nvPr>
         </p:nvPicPr>
         <p:blipFill>
-          <a:blip r:embed="rId2" cstate="print">
+          <a:blip cstate="print">
             <a:extLst>
               <a:ext uri="{28A0092B-C50C-407E-A947-70E740481C1C}">
                 <a14:useLocalDpi xmlns:a14="http://schemas.microsoft.com/office/drawing/2010/main" val="0"/>
               </a:ext>
               <a:ext uri="{96DAC541-7B7A-43D3-8B79-37D633B846F1}">
-                <asvg:svgBlip xmlns:asvg="http://schemas.microsoft.com/office/drawing/2016/SVG/main" r:embed="rId3"/>
+                <asvg:svgBlip xmlns:asvg="http://schemas.microsoft.com/office/drawing/2016/SVG/main" r:embed="rId2"/>
               </a:ext>
             </a:extLst>
           </a:blip>
